--- a/classes/parte-10-seguridad-en-la-nube-y-contenedores/226-ataques-y-pentest-en-entornos-cloud/clase-226-presentacion.pptx
+++ b/classes/parte-10-seguridad-en-la-nube-y-contenedores/226-ataques-y-pentest-en-entornos-cloud/clase-226-presentacion.pptx
@@ -17,6 +17,10 @@
     <p:sldId id="265" r:id="rId16"/>
     <p:sldId id="266" r:id="rId17"/>
     <p:sldId id="267" r:id="rId18"/>
+    <p:sldId id="268" r:id="rId19"/>
+    <p:sldId id="269" r:id="rId20"/>
+    <p:sldId id="270" r:id="rId21"/>
+    <p:sldId id="271" r:id="rId22"/>
   </p:sldIdLst>
   <p:sldSz cx="9144000" cy="6858000" type="screen4x3"/>
   <p:notesSz cx="6858000" cy="9144000"/>
@@ -3198,7 +3202,7 @@
                   <a:srgbClr val="0B3D2E"/>
                 </a:solidFill>
               </a:rPr>
-              <a:t>⚠️ Errores comunes</a:t>
+              <a:t>🧪 Laboratorio guiado</a:t>
             </a:r>
           </a:p>
         </p:txBody>
@@ -3236,67 +3240,97 @@
                   <a:srgbClr val="22282E"/>
                 </a:solidFill>
               </a:rPr>
-              <a:t>•  AccessDenied al enumerar — Permisos realmente mínimos; prueba rutas indirectas (assume-role, passrole).</a:t>
-            </a:r>
-          </a:p>
-          <a:p>
-            <a:pPr>
-              <a:spcAft>
-                <a:spcPts val="600"/>
-              </a:spcAft>
-            </a:pPr>
-            <a:r>
-              <a:rPr sz="1500">
-                <a:solidFill>
-                  <a:srgbClr val="22282E"/>
-                </a:solidFill>
-              </a:rPr>
-              <a:t>•  Metadatos devuelven 401 — IMDSv2 activo; necesitas un token PUT primero, o el ataque está mitigado.</a:t>
-            </a:r>
-          </a:p>
-          <a:p>
-            <a:pPr>
-              <a:spcAft>
-                <a:spcPts val="600"/>
-              </a:spcAft>
-            </a:pPr>
-            <a:r>
-              <a:rPr sz="1500">
-                <a:solidFill>
-                  <a:srgbClr val="22282E"/>
-                </a:solidFill>
-              </a:rPr>
-              <a:t>•  Recursos de CloudGoat siguen facturando — Olvidaste cloudgoat destroy; destrúyelos siempre al terminar.</a:t>
-            </a:r>
-          </a:p>
-          <a:p>
-            <a:pPr>
-              <a:spcAft>
-                <a:spcPts val="600"/>
-              </a:spcAft>
-            </a:pPr>
-            <a:r>
-              <a:rPr sz="1500">
-                <a:solidFill>
-                  <a:srgbClr val="22282E"/>
-                </a:solidFill>
-              </a:rPr>
-              <a:t>•  El proveedor bloquea el escaneo — Actividad marcada como abuso; respeta la política de pentest del proveedor.</a:t>
-            </a:r>
-          </a:p>
-          <a:p>
-            <a:pPr>
-              <a:spcAft>
-                <a:spcPts val="600"/>
-              </a:spcAft>
-            </a:pPr>
-            <a:r>
-              <a:rPr sz="1500">
-                <a:solidFill>
-                  <a:srgbClr val="22282E"/>
-                </a:solidFill>
-              </a:rPr>
-              <a:t>•  No hay evidencia para el informe — No se registró la salida; captura comandos y respuestas desde el inicio.</a:t>
+              <a:t>•  Despliega el escenario iamprivescbyrollback de CloudGoat; recibirás credenciales de acceso limitado.</a:t>
+            </a:r>
+          </a:p>
+          <a:p>
+            <a:pPr>
+              <a:spcAft>
+                <a:spcPts val="600"/>
+              </a:spcAft>
+            </a:pPr>
+            <a:r>
+              <a:rPr sz="1500">
+                <a:solidFill>
+                  <a:srgbClr val="22282E"/>
+                </a:solidFill>
+              </a:rPr>
+              <a:t>•  Reconocimiento IAM: con enumerate-iam y aws iam get-user, mapea qué permisos tienes.</a:t>
+            </a:r>
+          </a:p>
+          <a:p>
+            <a:pPr>
+              <a:spcAft>
+                <a:spcPts val="600"/>
+              </a:spcAft>
+            </a:pPr>
+            <a:r>
+              <a:rPr sz="1500">
+                <a:solidFill>
+                  <a:srgbClr val="22282E"/>
+                </a:solidFill>
+              </a:rPr>
+              <a:t>•  Identifica el permiso peligroso (p. ej. iam:CreatePolicyVersion con --set-as-default) que permite reescribir una política.</a:t>
+            </a:r>
+          </a:p>
+          <a:p>
+            <a:pPr>
+              <a:spcAft>
+                <a:spcPts val="600"/>
+              </a:spcAft>
+            </a:pPr>
+            <a:r>
+              <a:rPr sz="1500">
+                <a:solidFill>
+                  <a:srgbClr val="22282E"/>
+                </a:solidFill>
+              </a:rPr>
+              <a:t>•  Escala: crea una nueva versión de una política adjunta a tu usuario que conceda : y márcala por defecto; verifica que ahora eres admin.</a:t>
+            </a:r>
+          </a:p>
+          <a:p>
+            <a:pPr>
+              <a:spcAft>
+                <a:spcPts val="600"/>
+              </a:spcAft>
+            </a:pPr>
+            <a:r>
+              <a:rPr sz="1500">
+                <a:solidFill>
+                  <a:srgbClr val="22282E"/>
+                </a:solidFill>
+              </a:rPr>
+              <a:t>•  Repite con el escenario ec2ssrf: explota una app con SSRF para leer http://169.254.169.254/latest/meta-data/iam/security-credentials/ y roba las credenciales del rol.</a:t>
+            </a:r>
+          </a:p>
+          <a:p>
+            <a:pPr>
+              <a:spcAft>
+                <a:spcPts val="600"/>
+              </a:spcAft>
+            </a:pPr>
+            <a:r>
+              <a:rPr sz="1500">
+                <a:solidFill>
+                  <a:srgbClr val="22282E"/>
+                </a:solidFill>
+              </a:rPr>
+              <a:t>•  Usa esas credenciales para enumerar y acceder a un bucket S3 (movimiento lateral).</a:t>
+            </a:r>
+          </a:p>
+          <a:p>
+            <a:pPr>
+              <a:spcAft>
+                <a:spcPts val="600"/>
+              </a:spcAft>
+            </a:pPr>
+            <a:r>
+              <a:rPr sz="1500">
+                <a:solidFill>
+                  <a:srgbClr val="22282E"/>
+                </a:solidFill>
+              </a:rPr>
+              <a:t>•  Mapea cada paso a MITRE ATT&amp;CK for Cloud (Initial Access, Discovery, Privilege Escalation, Lateral Movement).</a:t>
             </a:r>
           </a:p>
         </p:txBody>
@@ -3347,7 +3381,7 @@
                   <a:srgbClr val="0B3D2E"/>
                 </a:solidFill>
               </a:rPr>
-              <a:t>❓ Preguntas frecuentes</a:t>
+              <a:t>✍️ Ejercicios</a:t>
             </a:r>
           </a:p>
         </p:txBody>
@@ -3385,82 +3419,82 @@
                   <a:srgbClr val="22282E"/>
                 </a:solidFill>
               </a:rPr>
-              <a:t>•  ❓ ¿Necesito permiso del proveedor para hacer pentest en la nube?</a:t>
-            </a:r>
-          </a:p>
-          <a:p>
-            <a:pPr>
-              <a:spcAft>
-                <a:spcPts val="600"/>
-              </a:spcAft>
-            </a:pPr>
-            <a:r>
-              <a:rPr sz="1500">
-                <a:solidFill>
-                  <a:srgbClr val="22282E"/>
-                </a:solidFill>
-              </a:rPr>
-              <a:t>•  Depende. Muchas pruebas a tus propios recursos están permitidas sin aviso previo, pero ciertas actividades (p. ej. stress/DoS) requieren autorización. Revisa siempre la política de pruebas del proveedor y ten permiso escrito del dueño de la cuenta.</a:t>
-            </a:r>
-          </a:p>
-          <a:p>
-            <a:pPr>
-              <a:spcAft>
-                <a:spcPts val="600"/>
-              </a:spcAft>
-            </a:pPr>
-            <a:r>
-              <a:rPr sz="1500">
-                <a:solidFill>
-                  <a:srgbClr val="22282E"/>
-                </a:solidFill>
-              </a:rPr>
-              <a:t>•  ❓ ¿Por qué el robo de credenciales de instancia es tan crítico?</a:t>
-            </a:r>
-          </a:p>
-          <a:p>
-            <a:pPr>
-              <a:spcAft>
-                <a:spcPts val="600"/>
-              </a:spcAft>
-            </a:pPr>
-            <a:r>
-              <a:rPr sz="1500">
-                <a:solidFill>
-                  <a:srgbClr val="22282E"/>
-                </a:solidFill>
-              </a:rPr>
-              <a:t>•  Porque el rol de la instancia suele tener permisos amplios; con esas credenciales el atacante actúa como el servicio legítimo, sin contraseña que romper. Por eso IMDSv2 y roles mínimos son clave.</a:t>
-            </a:r>
-          </a:p>
-          <a:p>
-            <a:pPr>
-              <a:spcAft>
-                <a:spcPts val="600"/>
-              </a:spcAft>
-            </a:pPr>
-            <a:r>
-              <a:rPr sz="1500">
-                <a:solidFill>
-                  <a:srgbClr val="22282E"/>
-                </a:solidFill>
-              </a:rPr>
-              <a:t>•  ❓ ¿CloudGoat es seguro para practicar?</a:t>
-            </a:r>
-          </a:p>
-          <a:p>
-            <a:pPr>
-              <a:spcAft>
-                <a:spcPts val="600"/>
-              </a:spcAft>
-            </a:pPr>
-            <a:r>
-              <a:rPr sz="1500">
-                <a:solidFill>
-                  <a:srgbClr val="22282E"/>
-                </a:solidFill>
-              </a:rPr>
-              <a:t>•  Sí, despliega recursos vulnerables en tu propia cuenta de forma intencionada y reproducible. Aun así, aíslalos y destrúyelos al terminar para evitar exposición y coste.</a:t>
+              <a:t>•  Enumera los roles y caminos asumibles que PMapper puede observar desde una identidad de laboratorio y registra permisos o cuentas fuera de cobertura.</a:t>
+            </a:r>
+          </a:p>
+          <a:p>
+            <a:pPr>
+              <a:spcAft>
+                <a:spcPts val="600"/>
+              </a:spcAft>
+            </a:pPr>
+            <a:r>
+              <a:rPr sz="1500">
+                <a:solidFill>
+                  <a:srgbClr val="22282E"/>
+                </a:solidFill>
+              </a:rPr>
+              <a:t>•  Explica por qué IMDSv2 mitiga el robo de credenciales por SSRF.</a:t>
+            </a:r>
+          </a:p>
+          <a:p>
+            <a:pPr>
+              <a:spcAft>
+                <a:spcPts val="600"/>
+              </a:spcAft>
+            </a:pPr>
+            <a:r>
+              <a:rPr sz="1500">
+                <a:solidFill>
+                  <a:srgbClr val="22282E"/>
+                </a:solidFill>
+              </a:rPr>
+              <a:t>•  Redacta la sección de "escalada de privilegios" de un informe de pentest con evidencias.</a:t>
+            </a:r>
+          </a:p>
+          <a:p>
+            <a:pPr>
+              <a:spcAft>
+                <a:spcPts val="600"/>
+              </a:spcAft>
+            </a:pPr>
+            <a:r>
+              <a:rPr sz="1500">
+                <a:solidFill>
+                  <a:srgbClr val="22282E"/>
+                </a:solidFill>
+              </a:rPr>
+              <a:t>•  Identifica tres técnicas de persistencia en AWS y su detección en CloudTrail.</a:t>
+            </a:r>
+          </a:p>
+          <a:p>
+            <a:pPr>
+              <a:spcAft>
+                <a:spcPts val="600"/>
+              </a:spcAft>
+            </a:pPr>
+            <a:r>
+              <a:rPr sz="1500">
+                <a:solidFill>
+                  <a:srgbClr val="22282E"/>
+                </a:solidFill>
+              </a:rPr>
+              <a:t>•  Resuelve otro escenario de CloudGoat y documenta el kill chain.</a:t>
+            </a:r>
+          </a:p>
+          <a:p>
+            <a:pPr>
+              <a:spcAft>
+                <a:spcPts val="600"/>
+              </a:spcAft>
+            </a:pPr>
+            <a:r>
+              <a:rPr sz="1500">
+                <a:solidFill>
+                  <a:srgbClr val="22282E"/>
+                </a:solidFill>
+              </a:rPr>
+              <a:t>•  Diseña una regla de detección para la creación anómala de claves de acceso IAM.</a:t>
             </a:r>
           </a:p>
         </p:txBody>
@@ -3511,7 +3545,7 @@
                   <a:srgbClr val="0B3D2E"/>
                 </a:solidFill>
               </a:rPr>
-              <a:t>🔗 Referencias</a:t>
+              <a:t>📝 Reto verificable</a:t>
             </a:r>
           </a:p>
         </p:txBody>
@@ -3549,71 +3583,623 @@
                   <a:srgbClr val="22282E"/>
                 </a:solidFill>
               </a:rPr>
-              <a:t>•  MITRE ATT&amp;CK — Cloud Matrix (IaaS). &lt;https://attack.mitre.org/matrices/enterprise/cloud/&gt;</a:t>
-            </a:r>
-          </a:p>
-          <a:p>
-            <a:pPr>
-              <a:spcAft>
-                <a:spcPts val="600"/>
-              </a:spcAft>
-            </a:pPr>
-            <a:r>
-              <a:rPr sz="1500">
-                <a:solidFill>
-                  <a:srgbClr val="22282E"/>
-                </a:solidFill>
-              </a:rPr>
-              <a:t>•  CloudGoat (Rhino Security Labs). &lt;https://github.com/RhinoSecurityLabs/cloudgoat&gt;</a:t>
-            </a:r>
-          </a:p>
-          <a:p>
-            <a:pPr>
-              <a:spcAft>
-                <a:spcPts val="600"/>
-              </a:spcAft>
-            </a:pPr>
-            <a:r>
-              <a:rPr sz="1500">
-                <a:solidFill>
-                  <a:srgbClr val="22282E"/>
-                </a:solidFill>
-              </a:rPr>
-              <a:t>•  Pacu — AWS exploitation framework. &lt;https://github.com/RhinoSecurityLabs/pacu&gt;</a:t>
-            </a:r>
-          </a:p>
-          <a:p>
-            <a:pPr>
-              <a:spcAft>
-                <a:spcPts val="600"/>
-              </a:spcAft>
-            </a:pPr>
-            <a:r>
-              <a:rPr sz="1500">
-                <a:solidFill>
-                  <a:srgbClr val="22282E"/>
-                </a:solidFill>
-              </a:rPr>
-              <a:t>•  AWS — Use IMDSv2. &lt;https://docs.aws.amazon.com/AWSEC2/latest/UserGuide/configuring-instance-metadata-service.html&gt;</a:t>
-            </a:r>
-          </a:p>
-          <a:p>
-            <a:pPr>
-              <a:spcAft>
-                <a:spcPts val="600"/>
-              </a:spcAft>
-            </a:pPr>
-            <a:r>
-              <a:rPr sz="1500">
-                <a:solidFill>
-                  <a:srgbClr val="22282E"/>
-                </a:solidFill>
-              </a:rPr>
-              <a:t>•  Rhino Security Labs — AWS privilege escalation. &lt;https://rhinosecuritylabs.com/aws/aws-privilege-escalation-methods-mitigation/&gt;</a:t>
-            </a:r>
-          </a:p>
-        </p:txBody>
-      </p:sp>
+              <a:t>•  Resuelve de principio a fin un escenario de CloudGoat que empiece con acceso limitado y termine en</a:t>
+            </a:r>
+          </a:p>
+          <a:p>
+            <a:pPr>
+              <a:spcAft>
+                <a:spcPts val="600"/>
+              </a:spcAft>
+            </a:pPr>
+            <a:r>
+              <a:rPr sz="1500">
+                <a:solidFill>
+                  <a:srgbClr val="22282E"/>
+                </a:solidFill>
+              </a:rPr>
+              <a:t>•  administrador, documentando el camino y luego aplicando las remediaciones que lo cierren.</a:t>
+            </a:r>
+          </a:p>
+          <a:p>
+            <a:pPr>
+              <a:spcAft>
+                <a:spcPts val="600"/>
+              </a:spcAft>
+            </a:pPr>
+            <a:r>
+              <a:rPr sz="1500">
+                <a:solidFill>
+                  <a:srgbClr val="22282E"/>
+                </a:solidFill>
+              </a:rPr>
+              <a:t>•  Criterio de aceptación: el informe incluye cada paso con el comando usado, la técnica ATT&amp;CK</a:t>
+            </a:r>
+          </a:p>
+          <a:p>
+            <a:pPr>
+              <a:spcAft>
+                <a:spcPts val="600"/>
+              </a:spcAft>
+            </a:pPr>
+            <a:r>
+              <a:rPr sz="1500">
+                <a:solidFill>
+                  <a:srgbClr val="22282E"/>
+                </a:solidFill>
+              </a:rPr>
+              <a:t>•  correspondiente y la evidencia; tras aplicar las remediaciones, reejecutar el ataque falla en el</a:t>
+            </a:r>
+          </a:p>
+          <a:p>
+            <a:pPr>
+              <a:spcAft>
+                <a:spcPts val="600"/>
+              </a:spcAft>
+            </a:pPr>
+            <a:r>
+              <a:rPr sz="1500">
+                <a:solidFill>
+                  <a:srgbClr val="22282E"/>
+                </a:solidFill>
+              </a:rPr>
+              <a:t>•  punto de escalada.</a:t>
+            </a:r>
+          </a:p>
+        </p:txBody>
+      </p:sp>
+    </p:spTree>
+  </p:cSld>
+  <p:clrMapOvr>
+    <a:masterClrMapping/>
+  </p:clrMapOvr>
+</p:sld>
+</file>
+
+<file path=ppt/slides/slide13.xml><?xml version="1.0" encoding="utf-8"?>
+<p:sld xmlns:a="http://schemas.openxmlformats.org/drawingml/2006/main" xmlns:p="http://schemas.openxmlformats.org/presentationml/2006/main" xmlns:r="http://schemas.openxmlformats.org/officeDocument/2006/relationships">
+  <p:cSld>
+    <p:spTree>
+      <p:nvGrpSpPr>
+        <p:cNvPr id="1" name=""/>
+        <p:cNvGrpSpPr/>
+        <p:nvPr/>
+      </p:nvGrpSpPr>
+      <p:grpSpPr/>
+      <p:sp>
+        <p:nvSpPr>
+          <p:cNvPr id="2" name="TextBox 1"/>
+          <p:cNvSpPr txBox="1"/>
+          <p:nvPr/>
+        </p:nvSpPr>
+        <p:spPr>
+          <a:xfrm>
+            <a:off x="457200" y="320040"/>
+            <a:ext cx="8229600" cy="822960"/>
+          </a:xfrm>
+          <a:prstGeom prst="rect">
+            <a:avLst/>
+          </a:prstGeom>
+          <a:noFill/>
+        </p:spPr>
+        <p:txBody>
+          <a:bodyPr wrap="square">
+            <a:spAutoFit/>
+          </a:bodyPr>
+          <a:lstStyle/>
+          <a:p>
+            <a:r>
+              <a:rPr sz="2600" b="1">
+                <a:solidFill>
+                  <a:srgbClr val="0B3D2E"/>
+                </a:solidFill>
+              </a:rPr>
+              <a:t>⚠️ Errores comunes</a:t>
+            </a:r>
+          </a:p>
+        </p:txBody>
+      </p:sp>
+      <p:sp>
+        <p:nvSpPr>
+          <p:cNvPr id="3" name="TextBox 2"/>
+          <p:cNvSpPr txBox="1"/>
+          <p:nvPr/>
+        </p:nvSpPr>
+        <p:spPr>
+          <a:xfrm>
+            <a:off x="457200" y="1280160"/>
+            <a:ext cx="8229600" cy="4937760"/>
+          </a:xfrm>
+          <a:prstGeom prst="rect">
+            <a:avLst/>
+          </a:prstGeom>
+          <a:noFill/>
+        </p:spPr>
+        <p:txBody>
+          <a:bodyPr wrap="square">
+            <a:spAutoFit/>
+          </a:bodyPr>
+          <a:lstStyle/>
+          <a:p>
+            <a:pPr>
+              <a:spcAft>
+                <a:spcPts val="600"/>
+              </a:spcAft>
+            </a:pPr>
+            <a:r>
+              <a:rPr sz="1500">
+                <a:solidFill>
+                  <a:srgbClr val="22282E"/>
+                </a:solidFill>
+              </a:rPr>
+              <a:t>•  AccessDenied al enumerar — Permisos realmente mínimos; prueba rutas indirectas (assume-role, passrole).</a:t>
+            </a:r>
+          </a:p>
+          <a:p>
+            <a:pPr>
+              <a:spcAft>
+                <a:spcPts val="600"/>
+              </a:spcAft>
+            </a:pPr>
+            <a:r>
+              <a:rPr sz="1500">
+                <a:solidFill>
+                  <a:srgbClr val="22282E"/>
+                </a:solidFill>
+              </a:rPr>
+              <a:t>•  Metadatos devuelven 401 — IMDSv2 activo; necesitas un token PUT primero, o el ataque está mitigado.</a:t>
+            </a:r>
+          </a:p>
+          <a:p>
+            <a:pPr>
+              <a:spcAft>
+                <a:spcPts val="600"/>
+              </a:spcAft>
+            </a:pPr>
+            <a:r>
+              <a:rPr sz="1500">
+                <a:solidFill>
+                  <a:srgbClr val="22282E"/>
+                </a:solidFill>
+              </a:rPr>
+              <a:t>•  Recursos de CloudGoat siguen facturando — Olvidaste cloudgoat destroy; destrúyelos siempre al terminar.</a:t>
+            </a:r>
+          </a:p>
+          <a:p>
+            <a:pPr>
+              <a:spcAft>
+                <a:spcPts val="600"/>
+              </a:spcAft>
+            </a:pPr>
+            <a:r>
+              <a:rPr sz="1500">
+                <a:solidFill>
+                  <a:srgbClr val="22282E"/>
+                </a:solidFill>
+              </a:rPr>
+              <a:t>•  El proveedor bloquea el escaneo — Actividad marcada como abuso; respeta la política de pentest del proveedor.</a:t>
+            </a:r>
+          </a:p>
+          <a:p>
+            <a:pPr>
+              <a:spcAft>
+                <a:spcPts val="600"/>
+              </a:spcAft>
+            </a:pPr>
+            <a:r>
+              <a:rPr sz="1500">
+                <a:solidFill>
+                  <a:srgbClr val="22282E"/>
+                </a:solidFill>
+              </a:rPr>
+              <a:t>•  No hay evidencia para el informe — No se registró la salida; captura comandos y respuestas desde el inicio.</a:t>
+            </a:r>
+          </a:p>
+        </p:txBody>
+      </p:sp>
+    </p:spTree>
+  </p:cSld>
+  <p:clrMapOvr>
+    <a:masterClrMapping/>
+  </p:clrMapOvr>
+</p:sld>
+</file>
+
+<file path=ppt/slides/slide14.xml><?xml version="1.0" encoding="utf-8"?>
+<p:sld xmlns:a="http://schemas.openxmlformats.org/drawingml/2006/main" xmlns:p="http://schemas.openxmlformats.org/presentationml/2006/main" xmlns:r="http://schemas.openxmlformats.org/officeDocument/2006/relationships">
+  <p:cSld>
+    <p:spTree>
+      <p:nvGrpSpPr>
+        <p:cNvPr id="1" name=""/>
+        <p:cNvGrpSpPr/>
+        <p:nvPr/>
+      </p:nvGrpSpPr>
+      <p:grpSpPr/>
+      <p:sp>
+        <p:nvSpPr>
+          <p:cNvPr id="2" name="TextBox 1"/>
+          <p:cNvSpPr txBox="1"/>
+          <p:nvPr/>
+        </p:nvSpPr>
+        <p:spPr>
+          <a:xfrm>
+            <a:off x="457200" y="320040"/>
+            <a:ext cx="8229600" cy="822960"/>
+          </a:xfrm>
+          <a:prstGeom prst="rect">
+            <a:avLst/>
+          </a:prstGeom>
+          <a:noFill/>
+        </p:spPr>
+        <p:txBody>
+          <a:bodyPr wrap="square">
+            <a:spAutoFit/>
+          </a:bodyPr>
+          <a:lstStyle/>
+          <a:p>
+            <a:r>
+              <a:rPr sz="2600" b="1">
+                <a:solidFill>
+                  <a:srgbClr val="0B3D2E"/>
+                </a:solidFill>
+              </a:rPr>
+              <a:t>❓ Preguntas frecuentes</a:t>
+            </a:r>
+          </a:p>
+        </p:txBody>
+      </p:sp>
+      <p:sp>
+        <p:nvSpPr>
+          <p:cNvPr id="3" name="TextBox 2"/>
+          <p:cNvSpPr txBox="1"/>
+          <p:nvPr/>
+        </p:nvSpPr>
+        <p:spPr>
+          <a:xfrm>
+            <a:off x="457200" y="1280160"/>
+            <a:ext cx="8229600" cy="4937760"/>
+          </a:xfrm>
+          <a:prstGeom prst="rect">
+            <a:avLst/>
+          </a:prstGeom>
+          <a:noFill/>
+        </p:spPr>
+        <p:txBody>
+          <a:bodyPr wrap="square">
+            <a:spAutoFit/>
+          </a:bodyPr>
+          <a:lstStyle/>
+          <a:p>
+            <a:pPr>
+              <a:spcAft>
+                <a:spcPts val="600"/>
+              </a:spcAft>
+            </a:pPr>
+            <a:r>
+              <a:rPr sz="1500">
+                <a:solidFill>
+                  <a:srgbClr val="22282E"/>
+                </a:solidFill>
+              </a:rPr>
+              <a:t>•  ❓ ¿Necesito permiso del proveedor para hacer pentest en la nube?</a:t>
+            </a:r>
+          </a:p>
+          <a:p>
+            <a:pPr>
+              <a:spcAft>
+                <a:spcPts val="600"/>
+              </a:spcAft>
+            </a:pPr>
+            <a:r>
+              <a:rPr sz="1500">
+                <a:solidFill>
+                  <a:srgbClr val="22282E"/>
+                </a:solidFill>
+              </a:rPr>
+              <a:t>•  Depende. Muchas pruebas a tus propios recursos están permitidas sin aviso previo, pero ciertas actividades (p. ej. stress/DoS) requieren autorización. Revisa siempre la política de pruebas del…</a:t>
+            </a:r>
+          </a:p>
+          <a:p>
+            <a:pPr>
+              <a:spcAft>
+                <a:spcPts val="600"/>
+              </a:spcAft>
+            </a:pPr>
+            <a:r>
+              <a:rPr sz="1500">
+                <a:solidFill>
+                  <a:srgbClr val="22282E"/>
+                </a:solidFill>
+              </a:rPr>
+              <a:t>•  ❓ ¿Por qué el robo de credenciales de instancia es tan crítico?</a:t>
+            </a:r>
+          </a:p>
+          <a:p>
+            <a:pPr>
+              <a:spcAft>
+                <a:spcPts val="600"/>
+              </a:spcAft>
+            </a:pPr>
+            <a:r>
+              <a:rPr sz="1500">
+                <a:solidFill>
+                  <a:srgbClr val="22282E"/>
+                </a:solidFill>
+              </a:rPr>
+              <a:t>•  Porque el rol de la instancia suele tener permisos amplios; con esas credenciales el atacante actúa como el servicio legítimo, sin contraseña que romper. Por eso IMDSv2 y roles mínimos son clave.</a:t>
+            </a:r>
+          </a:p>
+          <a:p>
+            <a:pPr>
+              <a:spcAft>
+                <a:spcPts val="600"/>
+              </a:spcAft>
+            </a:pPr>
+            <a:r>
+              <a:rPr sz="1500">
+                <a:solidFill>
+                  <a:srgbClr val="22282E"/>
+                </a:solidFill>
+              </a:rPr>
+              <a:t>•  ❓ ¿CloudGoat es seguro para practicar?</a:t>
+            </a:r>
+          </a:p>
+          <a:p>
+            <a:pPr>
+              <a:spcAft>
+                <a:spcPts val="600"/>
+              </a:spcAft>
+            </a:pPr>
+            <a:r>
+              <a:rPr sz="1500">
+                <a:solidFill>
+                  <a:srgbClr val="22282E"/>
+                </a:solidFill>
+              </a:rPr>
+              <a:t>•  Sí, despliega recursos vulnerables en tu propia cuenta de forma intencionada y reproducible. Aun así, aíslalos y destrúyelos al terminar para evitar exposición y coste.</a:t>
+            </a:r>
+          </a:p>
+        </p:txBody>
+      </p:sp>
+    </p:spTree>
+  </p:cSld>
+  <p:clrMapOvr>
+    <a:masterClrMapping/>
+  </p:clrMapOvr>
+</p:sld>
+</file>
+
+<file path=ppt/slides/slide15.xml><?xml version="1.0" encoding="utf-8"?>
+<p:sld xmlns:a="http://schemas.openxmlformats.org/drawingml/2006/main" xmlns:p="http://schemas.openxmlformats.org/presentationml/2006/main" xmlns:r="http://schemas.openxmlformats.org/officeDocument/2006/relationships">
+  <p:cSld>
+    <p:spTree>
+      <p:nvGrpSpPr>
+        <p:cNvPr id="1" name=""/>
+        <p:cNvGrpSpPr/>
+        <p:nvPr/>
+      </p:nvGrpSpPr>
+      <p:grpSpPr/>
+      <p:sp>
+        <p:nvSpPr>
+          <p:cNvPr id="2" name="TextBox 1"/>
+          <p:cNvSpPr txBox="1"/>
+          <p:nvPr/>
+        </p:nvSpPr>
+        <p:spPr>
+          <a:xfrm>
+            <a:off x="457200" y="320040"/>
+            <a:ext cx="8229600" cy="822960"/>
+          </a:xfrm>
+          <a:prstGeom prst="rect">
+            <a:avLst/>
+          </a:prstGeom>
+          <a:noFill/>
+        </p:spPr>
+        <p:txBody>
+          <a:bodyPr wrap="square">
+            <a:spAutoFit/>
+          </a:bodyPr>
+          <a:lstStyle/>
+          <a:p>
+            <a:r>
+              <a:rPr sz="2600" b="1">
+                <a:solidFill>
+                  <a:srgbClr val="0B3D2E"/>
+                </a:solidFill>
+              </a:rPr>
+              <a:t>🔗 Referencias verificables y alcance</a:t>
+            </a:r>
+          </a:p>
+        </p:txBody>
+      </p:sp>
+      <p:sp>
+        <p:nvSpPr>
+          <p:cNvPr id="3" name="TextBox 2"/>
+          <p:cNvSpPr txBox="1"/>
+          <p:nvPr/>
+        </p:nvSpPr>
+        <p:spPr>
+          <a:xfrm>
+            <a:off x="457200" y="1280160"/>
+            <a:ext cx="8229600" cy="4937760"/>
+          </a:xfrm>
+          <a:prstGeom prst="rect">
+            <a:avLst/>
+          </a:prstGeom>
+          <a:noFill/>
+        </p:spPr>
+        <p:txBody>
+          <a:bodyPr wrap="square">
+            <a:spAutoFit/>
+          </a:bodyPr>
+          <a:lstStyle/>
+          <a:p>
+            <a:pPr>
+              <a:spcAft>
+                <a:spcPts val="600"/>
+              </a:spcAft>
+            </a:pPr>
+            <a:r>
+              <a:rPr sz="1500">
+                <a:solidFill>
+                  <a:srgbClr val="22282E"/>
+                </a:solidFill>
+              </a:rPr>
+              <a:t>•  AWS Customer Support Policy for Penetration Testing. &lt;https://aws.amazon.com/security/penetration-testing/&gt; — actividades permitidas y prohibidas; consultar antes de cada prueba.</a:t>
+            </a:r>
+          </a:p>
+          <a:p>
+            <a:pPr>
+              <a:spcAft>
+                <a:spcPts val="600"/>
+              </a:spcAft>
+            </a:pPr>
+            <a:r>
+              <a:rPr sz="1500">
+                <a:solidFill>
+                  <a:srgbClr val="22282E"/>
+                </a:solidFill>
+              </a:rPr>
+              <a:t>•  MITRE ATT&amp;CK — Cloud Matrix. &lt;https://attack.mitre.org/matrices/enterprise/cloud/&gt; — vocabulario de comportamientos, no autorización ni prueba de impacto.</a:t>
+            </a:r>
+          </a:p>
+          <a:p>
+            <a:pPr>
+              <a:spcAft>
+                <a:spcPts val="600"/>
+              </a:spcAft>
+            </a:pPr>
+            <a:r>
+              <a:rPr sz="1500">
+                <a:solidFill>
+                  <a:srgbClr val="22282E"/>
+                </a:solidFill>
+              </a:rPr>
+              <a:t>•  AWS — Instance Metadata Service. &lt;https://docs.aws.amazon.com/AWSEC2/latest/UserGuide/configuring-instance-metadata-service.html&gt; — semántica oficial de IMDSv2, token y configuración.</a:t>
+            </a:r>
+          </a:p>
+          <a:p>
+            <a:pPr>
+              <a:spcAft>
+                <a:spcPts val="600"/>
+              </a:spcAft>
+            </a:pPr>
+            <a:r>
+              <a:rPr sz="1500">
+                <a:solidFill>
+                  <a:srgbClr val="22282E"/>
+                </a:solidFill>
+              </a:rPr>
+              <a:t>•  CloudGoat. &lt;https://github.com/RhinoSecurityLabs/cloudgoat&gt; — laboratorio deliberadamente vulnerable; revisar costos y destruir recursos.</a:t>
+            </a:r>
+          </a:p>
+          <a:p>
+            <a:pPr>
+              <a:spcAft>
+                <a:spcPts val="600"/>
+              </a:spcAft>
+            </a:pPr>
+            <a:r>
+              <a:rPr sz="1500">
+                <a:solidFill>
+                  <a:srgbClr val="22282E"/>
+                </a:solidFill>
+              </a:rPr>
+              <a:t>•  Pacu. &lt;https://github.com/RhinoSecurityLabs/pacu&gt; — herramienta abierta; validar módulos y llamadas antes de ejecutarlos.</a:t>
+            </a:r>
+          </a:p>
+          <a:p>
+            <a:pPr>
+              <a:spcAft>
+                <a:spcPts val="600"/>
+              </a:spcAft>
+            </a:pPr>
+            <a:r>
+              <a:rPr sz="1500">
+                <a:solidFill>
+                  <a:srgbClr val="22282E"/>
+                </a:solidFill>
+              </a:rPr>
+              <a:t>•  Rhino Security Labs — AWS privilege escalation. &lt;https://rhinosecuritylabs.com/aws/aws-privilege-escalation-methods-mitigation/&gt; — investigación complementaria que requiere contraste con evaluación…</a:t>
+            </a:r>
+          </a:p>
+        </p:txBody>
+      </p:sp>
+    </p:spTree>
+  </p:cSld>
+  <p:clrMapOvr>
+    <a:masterClrMapping/>
+  </p:clrMapOvr>
+</p:sld>
+</file>
+
+<file path=ppt/slides/slide16.xml><?xml version="1.0" encoding="utf-8"?>
+<p:sld xmlns:a="http://schemas.openxmlformats.org/drawingml/2006/main" xmlns:p="http://schemas.openxmlformats.org/presentationml/2006/main" xmlns:r="http://schemas.openxmlformats.org/officeDocument/2006/relationships">
+  <p:cSld>
+    <p:spTree>
+      <p:nvGrpSpPr>
+        <p:cNvPr id="1" name=""/>
+        <p:cNvGrpSpPr/>
+        <p:nvPr/>
+      </p:nvGrpSpPr>
+      <p:grpSpPr/>
+      <p:sp>
+        <p:nvSpPr>
+          <p:cNvPr id="2" name="TextBox 1"/>
+          <p:cNvSpPr txBox="1"/>
+          <p:nvPr/>
+        </p:nvSpPr>
+        <p:spPr>
+          <a:xfrm>
+            <a:off x="457200" y="274320"/>
+            <a:ext cx="8229600" cy="640080"/>
+          </a:xfrm>
+          <a:prstGeom prst="rect">
+            <a:avLst/>
+          </a:prstGeom>
+          <a:noFill/>
+        </p:spPr>
+        <p:txBody>
+          <a:bodyPr wrap="square">
+            <a:spAutoFit/>
+          </a:bodyPr>
+          <a:lstStyle/>
+          <a:p>
+            <a:r>
+              <a:rPr sz="2200" b="1">
+                <a:solidFill>
+                  <a:srgbClr val="0B3D2E"/>
+                </a:solidFill>
+              </a:rPr>
+              <a:t>Diagrama de la clase</a:t>
+            </a:r>
+          </a:p>
+        </p:txBody>
+      </p:sp>
+      <p:pic>
+        <p:nvPicPr>
+          <p:cNvPr id="3" name="Picture 2" descr="bf791b98cbebae3c.png"/>
+          <p:cNvPicPr>
+            <a:picLocks noChangeAspect="1"/>
+          </p:cNvPicPr>
+          <p:nvPr/>
+        </p:nvPicPr>
+        <p:blipFill>
+          <a:blip r:embed="rId2"/>
+          <a:stretch>
+            <a:fillRect/>
+          </a:stretch>
+        </p:blipFill>
+        <p:spPr>
+          <a:xfrm>
+            <a:off x="457200" y="3579876"/>
+            <a:ext cx="8229600" cy="338328"/>
+          </a:xfrm>
+          <a:prstGeom prst="rect">
+            <a:avLst/>
+          </a:prstGeom>
+        </p:spPr>
+      </p:pic>
     </p:spTree>
   </p:cSld>
   <p:clrMapOvr>
@@ -3996,7 +4582,7 @@
                   <a:srgbClr val="22282E"/>
                 </a:solidFill>
               </a:rPr>
-              <a:t>•  2 — Credenciales filtradas</a:t>
+              <a:t>•  2 — Credenciales y sesiones expuestas</a:t>
             </a:r>
           </a:p>
           <a:p>
@@ -4122,7 +4708,7 @@
                   <a:srgbClr val="0B3D2E"/>
                 </a:solidFill>
               </a:rPr>
-              <a:t>📖 Definiciones y características</a:t>
+              <a:t>🧠 Explicación en profundidad</a:t>
             </a:r>
           </a:p>
         </p:txBody>
@@ -4160,97 +4746,82 @@
                   <a:srgbClr val="22282E"/>
                 </a:solidFill>
               </a:rPr>
-              <a:t>•  IMDS (Instance Metadata Service): endpoint local 169.254.169.254 que entrega credenciales del rol de la instancia. Clave: IMDSv2 con tokens mitiga el abuso por SSRF.</a:t>
-            </a:r>
-          </a:p>
-          <a:p>
-            <a:pPr>
-              <a:spcAft>
-                <a:spcPts val="600"/>
-              </a:spcAft>
-            </a:pPr>
-            <a:r>
-              <a:rPr sz="1500">
-                <a:solidFill>
-                  <a:srgbClr val="22282E"/>
-                </a:solidFill>
-              </a:rPr>
-              <a:t>•  SSRF hacia metadatos: forzar a la app a pedir el endpoint de metadatos. Clave: clásico vector para robar credenciales en la nube.</a:t>
-            </a:r>
-          </a:p>
-          <a:p>
-            <a:pPr>
-              <a:spcAft>
-                <a:spcPts val="600"/>
-              </a:spcAft>
-            </a:pPr>
-            <a:r>
-              <a:rPr sz="1500">
-                <a:solidFill>
-                  <a:srgbClr val="22282E"/>
-                </a:solidFill>
-              </a:rPr>
-              <a:t>•  Enumeración IAM: listar permisos propios con iam:SimulatePrincipalPolicy o fuerza bruta de APIs. Clave: define el mapa de ataque.</a:t>
-            </a:r>
-          </a:p>
-          <a:p>
-            <a:pPr>
-              <a:spcAft>
-                <a:spcPts val="600"/>
-              </a:spcAft>
-            </a:pPr>
-            <a:r>
-              <a:rPr sz="1500">
-                <a:solidFill>
-                  <a:srgbClr val="22282E"/>
-                </a:solidFill>
-              </a:rPr>
-              <a:t>•  Persistencia: crear usuarios/claves/roles ocultos o backdoors en funciones. Clave: sobrevive a la rotación de la credencial inicial.</a:t>
-            </a:r>
-          </a:p>
-          <a:p>
-            <a:pPr>
-              <a:spcAft>
-                <a:spcPts val="600"/>
-              </a:spcAft>
-            </a:pPr>
-            <a:r>
-              <a:rPr sz="1500">
-                <a:solidFill>
-                  <a:srgbClr val="22282E"/>
-                </a:solidFill>
-              </a:rPr>
-              <a:t>•  Pacu: framework de explotación AWS con módulos de enum y escalada. Clave: automatiza tácticas comunes en laboratorio.</a:t>
-            </a:r>
-          </a:p>
-          <a:p>
-            <a:pPr>
-              <a:spcAft>
-                <a:spcPts val="600"/>
-              </a:spcAft>
-            </a:pPr>
-            <a:r>
-              <a:rPr sz="1500">
-                <a:solidFill>
-                  <a:srgbClr val="22282E"/>
-                </a:solidFill>
-              </a:rPr>
-              <a:t>•  CloudGoat/CloudFoxable: entornos vulnerables intencionados para practicar. Clave: seguros y legales para entrenar.</a:t>
-            </a:r>
-          </a:p>
-          <a:p>
-            <a:pPr>
-              <a:spcAft>
-                <a:spcPts val="600"/>
-              </a:spcAft>
-            </a:pPr>
-            <a:r>
-              <a:rPr sz="1500">
-                <a:solidFill>
-                  <a:srgbClr val="22282E"/>
-                </a:solidFill>
-              </a:rPr>
-              <a:t>•  MITRE ATT&amp;CK for Cloud: matriz de tácticas/técnicas específicas de nube. Clave: estandariza el reporte.</a:t>
+              <a:t>•  Un pentest cloud autorizado evalúa relaciones de confianza y decisiones API, no solo puertos. El contrato debe identificar cuentas, suscripciones o proyectos; regiones; identidades de prueba…</a:t>
+            </a:r>
+          </a:p>
+          <a:p>
+            <a:pPr>
+              <a:spcAft>
+                <a:spcPts val="600"/>
+              </a:spcAft>
+            </a:pPr>
+            <a:r>
+              <a:rPr sz="1500">
+                <a:solidFill>
+                  <a:srgbClr val="22282E"/>
+                </a:solidFill>
+              </a:rPr>
+              <a:t>•  El diagrama impone puntos de control. Descubrir un nombre de bucket no autoriza leer objetos; obtener una credencial de laboratorio no autoriza enumerar otras cuentas; hallar una ruta teórica no…</a:t>
+            </a:r>
+          </a:p>
+          <a:p>
+            <a:pPr>
+              <a:spcAft>
+                <a:spcPts val="600"/>
+              </a:spcAft>
+            </a:pPr>
+            <a:r>
+              <a:rPr sz="1500">
+                <a:solidFill>
+                  <a:srgbClr val="22282E"/>
+                </a:solidFill>
+              </a:rPr>
+              <a:t>•  Una clave o token puede estar expirado, revocado, limitado por sesión o sujeto a condiciones. Primero se identifica la cuenta y principal con una API inocua y autorizada. Luego se enumeran…</a:t>
+            </a:r>
+          </a:p>
+          <a:p>
+            <a:pPr>
+              <a:spcAft>
+                <a:spcPts val="600"/>
+              </a:spcAft>
+            </a:pPr>
+            <a:r>
+              <a:rPr sz="1500">
+                <a:solidFill>
+                  <a:srgbClr val="22282E"/>
+                </a:solidFill>
+              </a:rPr>
+              <a:t>•  Las rutas de escalada combinan acciones. Crear una función solo importa si se puede elegir rol, código, invocación y salida. Modificar una policy requiere una versión efectiva y capacidad de usar el…</a:t>
+            </a:r>
+          </a:p>
+          <a:p>
+            <a:pPr>
+              <a:spcAft>
+                <a:spcPts val="600"/>
+              </a:spcAft>
+            </a:pPr>
+            <a:r>
+              <a:rPr sz="1500">
+                <a:solidFill>
+                  <a:srgbClr val="22282E"/>
+                </a:solidFill>
+              </a:rPr>
+              <a:t>•  IMDS está disponible desde instancias según plataforma y configuración. En AWS, IMDSv2 usa un token obtenido por PUT y hop limit configurable, lo que reduce varias rutas de SSRF, pero no corrige una…</a:t>
+            </a:r>
+          </a:p>
+          <a:p>
+            <a:pPr>
+              <a:spcAft>
+                <a:spcPts val="600"/>
+              </a:spcAft>
+            </a:pPr>
+            <a:r>
+              <a:rPr sz="1500">
+                <a:solidFill>
+                  <a:srgbClr val="22282E"/>
+                </a:solidFill>
+              </a:rPr>
+              <a:t>•  Crear claves, usuarios, roles, funciones o suscripciones puede simular persistencia, pero cada artefacto genera riesgo y costo. Se usan nombres etiquetados, TTL, presupuesto y lista de limpieza. La…</a:t>
             </a:r>
           </a:p>
         </p:txBody>
@@ -4301,7 +4872,7 @@
                   <a:srgbClr val="0B3D2E"/>
                 </a:solidFill>
               </a:rPr>
-              <a:t>🧰 Herramientas y preparación</a:t>
+              <a:t>📖 Definiciones y características</a:t>
             </a:r>
           </a:p>
         </p:txBody>
@@ -4339,67 +4910,97 @@
                   <a:srgbClr val="22282E"/>
                 </a:solidFill>
               </a:rPr>
-              <a:t>•  Pacu, ScoutSuite, PMapper, enumerate-iam, y las CLIs oficiales.</a:t>
-            </a:r>
-          </a:p>
-          <a:p>
-            <a:pPr>
-              <a:spcAft>
-                <a:spcPts val="600"/>
-              </a:spcAft>
-            </a:pPr>
-            <a:r>
-              <a:rPr sz="1500">
-                <a:solidFill>
-                  <a:srgbClr val="22282E"/>
-                </a:solidFill>
-              </a:rPr>
-              <a:t>•  CloudGoat (Rhino Security Labs) para desplegar escenarios vulnerables en TU cuenta de laboratorio.</a:t>
-            </a:r>
-          </a:p>
-          <a:p>
-            <a:pPr>
-              <a:spcAft>
-                <a:spcPts val="600"/>
-              </a:spcAft>
-            </a:pPr>
-            <a:r>
-              <a:rPr sz="1500">
-                <a:solidFill>
-                  <a:srgbClr val="22282E"/>
-                </a:solidFill>
-              </a:rPr>
-              <a:t>•  Un entorno aislado y presupuesto controlado (los recursos cuestan dinero).</a:t>
-            </a:r>
-          </a:p>
-          <a:p>
-            <a:pPr>
-              <a:spcAft>
-                <a:spcPts val="600"/>
-              </a:spcAft>
-            </a:pPr>
-            <a:r>
-              <a:rPr sz="1500">
-                <a:solidFill>
-                  <a:srgbClr val="22282E"/>
-                </a:solidFill>
-              </a:rPr>
-              <a:t>•  python3 cloudgoat.py create iamprivescbyrollback</a:t>
-            </a:r>
-          </a:p>
-          <a:p>
-            <a:pPr>
-              <a:spcAft>
-                <a:spcPts val="600"/>
-              </a:spcAft>
-            </a:pPr>
-            <a:r>
-              <a:rPr sz="1500">
-                <a:solidFill>
-                  <a:srgbClr val="22282E"/>
-                </a:solidFill>
-              </a:rPr>
-              <a:t>•  enumerate-iam --access-key AKIA... --secret-key ...</a:t>
+              <a:t>•  IMDS (Instance Metadata Service): servicio local que entrega metadatos y, según configuración, credenciales de identidad de la carga. Clave: versión, token, hop limit y rol efectivo determinan…</a:t>
+            </a:r>
+          </a:p>
+          <a:p>
+            <a:pPr>
+              <a:spcAft>
+                <a:spcPts val="600"/>
+              </a:spcAft>
+            </a:pPr>
+            <a:r>
+              <a:rPr sz="1500">
+                <a:solidFill>
+                  <a:srgbClr val="22282E"/>
+                </a:solidFill>
+              </a:rPr>
+              <a:t>•  SSRF hacia metadatos: forzar a la app a pedir el endpoint de metadatos. Clave: clásico vector para robar credenciales en la nube.</a:t>
+            </a:r>
+          </a:p>
+          <a:p>
+            <a:pPr>
+              <a:spcAft>
+                <a:spcPts val="600"/>
+              </a:spcAft>
+            </a:pPr>
+            <a:r>
+              <a:rPr sz="1500">
+                <a:solidFill>
+                  <a:srgbClr val="22282E"/>
+                </a:solidFill>
+              </a:rPr>
+              <a:t>•  Enumeración IAM: determinar capacidades mediante políticas, simulación y llamadas autorizadas de bajo impacto. Clave: los resultados se interpretan con contexto y límites superiores.</a:t>
+            </a:r>
+          </a:p>
+          <a:p>
+            <a:pPr>
+              <a:spcAft>
+                <a:spcPts val="600"/>
+              </a:spcAft>
+            </a:pPr>
+            <a:r>
+              <a:rPr sz="1500">
+                <a:solidFill>
+                  <a:srgbClr val="22282E"/>
+                </a:solidFill>
+              </a:rPr>
+              <a:t>•  Persistencia: crear usuarios/claves/roles ocultos o backdoors en funciones. Clave: sobrevive a la rotación de la credencial inicial.</a:t>
+            </a:r>
+          </a:p>
+          <a:p>
+            <a:pPr>
+              <a:spcAft>
+                <a:spcPts val="600"/>
+              </a:spcAft>
+            </a:pPr>
+            <a:r>
+              <a:rPr sz="1500">
+                <a:solidFill>
+                  <a:srgbClr val="22282E"/>
+                </a:solidFill>
+              </a:rPr>
+              <a:t>•  Pacu: framework de investigación AWS con módulos de enumeración y validación. Clave: automatiza llamadas con la identidad configurada y debe limitarse a laboratorios autorizados.</a:t>
+            </a:r>
+          </a:p>
+          <a:p>
+            <a:pPr>
+              <a:spcAft>
+                <a:spcPts val="600"/>
+              </a:spcAft>
+            </a:pPr>
+            <a:r>
+              <a:rPr sz="1500">
+                <a:solidFill>
+                  <a:srgbClr val="22282E"/>
+                </a:solidFill>
+              </a:rPr>
+              <a:t>•  CloudGoat/CloudFoxable: entornos vulnerables intencionados para practicar. Clave: seguros y legales para entrenar.</a:t>
+            </a:r>
+          </a:p>
+          <a:p>
+            <a:pPr>
+              <a:spcAft>
+                <a:spcPts val="600"/>
+              </a:spcAft>
+            </a:pPr>
+            <a:r>
+              <a:rPr sz="1500">
+                <a:solidFill>
+                  <a:srgbClr val="22282E"/>
+                </a:solidFill>
+              </a:rPr>
+              <a:t>•  MITRE ATT&amp;CK for Cloud: matriz de tácticas/técnicas específicas de nube. Clave: estandariza el reporte.</a:t>
             </a:r>
           </a:p>
         </p:txBody>
@@ -4450,7 +5051,7 @@
                   <a:srgbClr val="0B3D2E"/>
                 </a:solidFill>
               </a:rPr>
-              <a:t>🧪 Laboratorio guiado</a:t>
+              <a:t>🔍 Caso razonado — SSRF con un rol casi sin permisos</a:t>
             </a:r>
           </a:p>
         </p:txBody>
@@ -4488,97 +5089,22 @@
                   <a:srgbClr val="22282E"/>
                 </a:solidFill>
               </a:rPr>
-              <a:t>•  Despliega el escenario iamprivescbyrollback de CloudGoat; recibirás credenciales de acceso limitado.</a:t>
-            </a:r>
-          </a:p>
-          <a:p>
-            <a:pPr>
-              <a:spcAft>
-                <a:spcPts val="600"/>
-              </a:spcAft>
-            </a:pPr>
-            <a:r>
-              <a:rPr sz="1500">
-                <a:solidFill>
-                  <a:srgbClr val="22282E"/>
-                </a:solidFill>
-              </a:rPr>
-              <a:t>•  Reconocimiento IAM: con enumerate-iam y aws iam get-user, mapea qué permisos tienes.</a:t>
-            </a:r>
-          </a:p>
-          <a:p>
-            <a:pPr>
-              <a:spcAft>
-                <a:spcPts val="600"/>
-              </a:spcAft>
-            </a:pPr>
-            <a:r>
-              <a:rPr sz="1500">
-                <a:solidFill>
-                  <a:srgbClr val="22282E"/>
-                </a:solidFill>
-              </a:rPr>
-              <a:t>•  Identifica el permiso peligroso (p. ej. iam:CreatePolicyVersion con --set-as-default) que permite reescribir una política.</a:t>
-            </a:r>
-          </a:p>
-          <a:p>
-            <a:pPr>
-              <a:spcAft>
-                <a:spcPts val="600"/>
-              </a:spcAft>
-            </a:pPr>
-            <a:r>
-              <a:rPr sz="1500">
-                <a:solidFill>
-                  <a:srgbClr val="22282E"/>
-                </a:solidFill>
-              </a:rPr>
-              <a:t>•  Escala: crea una nueva versión de una política adjunta a tu usuario que conceda : y márcala por defecto; verifica que ahora eres admin.</a:t>
-            </a:r>
-          </a:p>
-          <a:p>
-            <a:pPr>
-              <a:spcAft>
-                <a:spcPts val="600"/>
-              </a:spcAft>
-            </a:pPr>
-            <a:r>
-              <a:rPr sz="1500">
-                <a:solidFill>
-                  <a:srgbClr val="22282E"/>
-                </a:solidFill>
-              </a:rPr>
-              <a:t>•  Repite con el escenario ec2ssrf: explota una app con SSRF para leer http://169.254.169.254/latest/meta-data/iam/security-credentials/ y roba las credenciales del rol.</a:t>
-            </a:r>
-          </a:p>
-          <a:p>
-            <a:pPr>
-              <a:spcAft>
-                <a:spcPts val="600"/>
-              </a:spcAft>
-            </a:pPr>
-            <a:r>
-              <a:rPr sz="1500">
-                <a:solidFill>
-                  <a:srgbClr val="22282E"/>
-                </a:solidFill>
-              </a:rPr>
-              <a:t>•  Usa esas credenciales para enumerar y acceder a un bucket S3 (movimiento lateral).</a:t>
-            </a:r>
-          </a:p>
-          <a:p>
-            <a:pPr>
-              <a:spcAft>
-                <a:spcPts val="600"/>
-              </a:spcAft>
-            </a:pPr>
-            <a:r>
-              <a:rPr sz="1500">
-                <a:solidFill>
-                  <a:srgbClr val="22282E"/>
-                </a:solidFill>
-              </a:rPr>
-              <a:t>•  Mapea cada paso a MITRE ATT&amp;CK for Cloud (Initial Access, Discovery, Privilege Escalation, Lateral Movement).</a:t>
+              <a:t>•  En CloudGoat, una aplicación permite solicitar una URL interna y el tester obtiene una sesión temporal desde IMDS. Antes de celebrar «compromiso de AWS», identifica rol, expiración y permisos. La…</a:t>
+            </a:r>
+          </a:p>
+          <a:p>
+            <a:pPr>
+              <a:spcAft>
+                <a:spcPts val="600"/>
+              </a:spcAft>
+            </a:pPr>
+            <a:r>
+              <a:rPr sz="1500">
+                <a:solidFill>
+                  <a:srgbClr val="22282E"/>
+                </a:solidFill>
+              </a:rPr>
+              <a:t>•  El informe separa falla de aplicación, acceso a metadatos y exceso o adecuación del rol. La mitigación exige corregir SSRF y requerir IMDSv2, pero también prueba que retirar el permiso innecesario…</a:t>
             </a:r>
           </a:p>
         </p:txBody>
@@ -4629,7 +5155,7 @@
                   <a:srgbClr val="0B3D2E"/>
                 </a:solidFill>
               </a:rPr>
-              <a:t>✍️ Ejercicios</a:t>
+              <a:t>✅ Criterio de dominio</a:t>
             </a:r>
           </a:p>
         </p:txBody>
@@ -4667,82 +5193,7 @@
                   <a:srgbClr val="22282E"/>
                 </a:solidFill>
               </a:rPr>
-              <a:t>•  Enumera todos los roles asumibles desde una identidad dada con PMapper.</a:t>
-            </a:r>
-          </a:p>
-          <a:p>
-            <a:pPr>
-              <a:spcAft>
-                <a:spcPts val="600"/>
-              </a:spcAft>
-            </a:pPr>
-            <a:r>
-              <a:rPr sz="1500">
-                <a:solidFill>
-                  <a:srgbClr val="22282E"/>
-                </a:solidFill>
-              </a:rPr>
-              <a:t>•  Explica por qué IMDSv2 mitiga el robo de credenciales por SSRF.</a:t>
-            </a:r>
-          </a:p>
-          <a:p>
-            <a:pPr>
-              <a:spcAft>
-                <a:spcPts val="600"/>
-              </a:spcAft>
-            </a:pPr>
-            <a:r>
-              <a:rPr sz="1500">
-                <a:solidFill>
-                  <a:srgbClr val="22282E"/>
-                </a:solidFill>
-              </a:rPr>
-              <a:t>•  Redacta la sección de "escalada de privilegios" de un informe de pentest con evidencias.</a:t>
-            </a:r>
-          </a:p>
-          <a:p>
-            <a:pPr>
-              <a:spcAft>
-                <a:spcPts val="600"/>
-              </a:spcAft>
-            </a:pPr>
-            <a:r>
-              <a:rPr sz="1500">
-                <a:solidFill>
-                  <a:srgbClr val="22282E"/>
-                </a:solidFill>
-              </a:rPr>
-              <a:t>•  Identifica tres técnicas de persistencia en AWS y su detección en CloudTrail.</a:t>
-            </a:r>
-          </a:p>
-          <a:p>
-            <a:pPr>
-              <a:spcAft>
-                <a:spcPts val="600"/>
-              </a:spcAft>
-            </a:pPr>
-            <a:r>
-              <a:rPr sz="1500">
-                <a:solidFill>
-                  <a:srgbClr val="22282E"/>
-                </a:solidFill>
-              </a:rPr>
-              <a:t>•  Resuelve otro escenario de CloudGoat y documenta el kill chain.</a:t>
-            </a:r>
-          </a:p>
-          <a:p>
-            <a:pPr>
-              <a:spcAft>
-                <a:spcPts val="600"/>
-              </a:spcAft>
-            </a:pPr>
-            <a:r>
-              <a:rPr sz="1500">
-                <a:solidFill>
-                  <a:srgbClr val="22282E"/>
-                </a:solidFill>
-              </a:rPr>
-              <a:t>•  Diseña una regla de detección para la creación anómala de claves de acceso IAM.</a:t>
+              <a:t>•  Dominas la clase cuando defines reglas de compromiso cloud, conviertes una credencial en un grafo de capacidades, validas una ruta con impacto mínimo, mapeas técnica sin exagerar alcance y entregas…</a:t>
             </a:r>
           </a:p>
         </p:txBody>
@@ -4793,7 +5244,7 @@
                   <a:srgbClr val="0B3D2E"/>
                 </a:solidFill>
               </a:rPr>
-              <a:t>📝 Reto verificable</a:t>
+              <a:t>🧰 Herramientas y preparación</a:t>
             </a:r>
           </a:p>
         </p:txBody>
@@ -4831,67 +5282,37 @@
                   <a:srgbClr val="22282E"/>
                 </a:solidFill>
               </a:rPr>
-              <a:t>•  Resuelve de principio a fin un escenario de CloudGoat que empiece con acceso limitado y termine en</a:t>
-            </a:r>
-          </a:p>
-          <a:p>
-            <a:pPr>
-              <a:spcAft>
-                <a:spcPts val="600"/>
-              </a:spcAft>
-            </a:pPr>
-            <a:r>
-              <a:rPr sz="1500">
-                <a:solidFill>
-                  <a:srgbClr val="22282E"/>
-                </a:solidFill>
-              </a:rPr>
-              <a:t>•  administrador, documentando el camino y luego aplicando las remediaciones que lo cierren.</a:t>
-            </a:r>
-          </a:p>
-          <a:p>
-            <a:pPr>
-              <a:spcAft>
-                <a:spcPts val="600"/>
-              </a:spcAft>
-            </a:pPr>
-            <a:r>
-              <a:rPr sz="1500">
-                <a:solidFill>
-                  <a:srgbClr val="22282E"/>
-                </a:solidFill>
-              </a:rPr>
-              <a:t>•  Criterio de aceptación: el informe incluye cada paso con el comando usado, la técnica ATT&amp;CK</a:t>
-            </a:r>
-          </a:p>
-          <a:p>
-            <a:pPr>
-              <a:spcAft>
-                <a:spcPts val="600"/>
-              </a:spcAft>
-            </a:pPr>
-            <a:r>
-              <a:rPr sz="1500">
-                <a:solidFill>
-                  <a:srgbClr val="22282E"/>
-                </a:solidFill>
-              </a:rPr>
-              <a:t>•  correspondiente y la evidencia; tras aplicar las remediaciones, reejecutar el ataque falla en el</a:t>
-            </a:r>
-          </a:p>
-          <a:p>
-            <a:pPr>
-              <a:spcAft>
-                <a:spcPts val="600"/>
-              </a:spcAft>
-            </a:pPr>
-            <a:r>
-              <a:rPr sz="1500">
-                <a:solidFill>
-                  <a:srgbClr val="22282E"/>
-                </a:solidFill>
-              </a:rPr>
-              <a:t>•  punto de escalada.</a:t>
+              <a:t>•  Pacu, ScoutSuite, PMapper, enumerate-iam, y las CLIs oficiales.</a:t>
+            </a:r>
+          </a:p>
+          <a:p>
+            <a:pPr>
+              <a:spcAft>
+                <a:spcPts val="600"/>
+              </a:spcAft>
+            </a:pPr>
+            <a:r>
+              <a:rPr sz="1500">
+                <a:solidFill>
+                  <a:srgbClr val="22282E"/>
+                </a:solidFill>
+              </a:rPr>
+              <a:t>•  CloudGoat (Rhino Security Labs) para desplegar escenarios vulnerables en TU cuenta de laboratorio.</a:t>
+            </a:r>
+          </a:p>
+          <a:p>
+            <a:pPr>
+              <a:spcAft>
+                <a:spcPts val="600"/>
+              </a:spcAft>
+            </a:pPr>
+            <a:r>
+              <a:rPr sz="1500">
+                <a:solidFill>
+                  <a:srgbClr val="22282E"/>
+                </a:solidFill>
+              </a:rPr>
+              <a:t>•  Un entorno aislado y presupuesto controlado (los recursos cuestan dinero).</a:t>
             </a:r>
           </a:p>
         </p:txBody>
